--- a/examples/ppt/textboxes/textboxes-basic.pptx
+++ b/examples/ppt/textboxes/textboxes-basic.pptx
@@ -5,10 +5,10 @@
     <p:sldMasterId xmlns:r="http://schemas.openxmlformats.org/officeDocument/2006/relationships" id="2147483648" r:id="rId1"/>
   </p:sldMasterIdLst>
   <p:sldIdLst>
-    <p:sldId id="256" r:id="R82ee15e02cb14f15"/>
-    <p:sldId id="257" r:id="Rd58ec9132ef1410d"/>
-    <p:sldId id="258" r:id="Rc7de99aee15240d2"/>
-    <p:sldId id="259" r:id="Rfa107f7a941c4b0e"/>
+    <p:sldId id="256" r:id="R02326a8b06ee4628"/>
+    <p:sldId id="257" r:id="R5f489ff6c1444861"/>
+    <p:sldId id="258" r:id="R395c68781ee74554"/>
+    <p:sldId id="259" r:id="R2d9bbd443d7243ab"/>
   </p:sldIdLst>
   <p:sldSz cx="12192000" cy="6858000"/>
   <p:notesSz cx="6858000" cy="9144000"/>
@@ -283,7 +283,7 @@
 </file>
 
 <file path=ppt/slideMasters/slideMaster1.xml><?xml version="1.0" encoding="utf-8"?>
-<p:sldMaster xmlns:p="http://schemas.openxmlformats.org/presentationml/2006/main">
+<p:sldMaster xmlns:r="http://schemas.openxmlformats.org/officeDocument/2006/relationships" xmlns:p="http://schemas.openxmlformats.org/presentationml/2006/main">
   <p:cSld>
     <p:spTree>
       <p:nvGrpSpPr>
@@ -317,8 +317,8 @@
       <p:grpSpPr/>
       <p:sp>
         <p:nvSpPr>
-          <p:cNvPr id="10000" name="TextBox 1"/>
-          <p:cNvSpPr/>
+          <p:cNvPr id="100000" name="TextBox 1"/>
+          <p:cNvSpPr txBox="1"/>
           <p:nvPr/>
         </p:nvSpPr>
         <p:spPr>
@@ -343,8 +343,8 @@
       </p:sp>
       <p:sp>
         <p:nvSpPr>
-          <p:cNvPr id="10001" name="TextBox 2"/>
-          <p:cNvSpPr/>
+          <p:cNvPr id="100001" name="TextBox 2"/>
+          <p:cNvSpPr txBox="1"/>
           <p:nvPr/>
         </p:nvSpPr>
         <p:spPr>
@@ -373,8 +373,8 @@
       </p:sp>
       <p:sp>
         <p:nvSpPr>
-          <p:cNvPr id="10002" name="TextBox 3"/>
-          <p:cNvSpPr/>
+          <p:cNvPr id="100002" name="TextBox 3"/>
+          <p:cNvSpPr txBox="1"/>
           <p:nvPr/>
         </p:nvSpPr>
         <p:spPr>
@@ -403,8 +403,8 @@
       </p:sp>
       <p:sp>
         <p:nvSpPr>
-          <p:cNvPr id="10003" name="TextBox 4"/>
-          <p:cNvSpPr/>
+          <p:cNvPr id="100003" name="TextBox 4"/>
+          <p:cNvSpPr txBox="1"/>
           <p:nvPr/>
         </p:nvSpPr>
         <p:spPr>
@@ -433,8 +433,8 @@
       </p:sp>
       <p:sp>
         <p:nvSpPr>
-          <p:cNvPr id="10004" name="TextBox 5"/>
-          <p:cNvSpPr/>
+          <p:cNvPr id="100004" name="TextBox 5"/>
+          <p:cNvSpPr txBox="1"/>
           <p:nvPr/>
         </p:nvSpPr>
         <p:spPr>
@@ -478,8 +478,8 @@
       <p:grpSpPr/>
       <p:sp>
         <p:nvSpPr>
-          <p:cNvPr id="10005" name="TextBox 1"/>
-          <p:cNvSpPr/>
+          <p:cNvPr id="100005" name="TextBox 1"/>
+          <p:cNvSpPr txBox="1"/>
           <p:nvPr/>
         </p:nvSpPr>
         <p:spPr>
@@ -552,8 +552,8 @@
       </p:sp>
       <p:sp>
         <p:nvSpPr>
-          <p:cNvPr id="10006" name="TextBox 2"/>
-          <p:cNvSpPr/>
+          <p:cNvPr id="100006" name="TextBox 2"/>
+          <p:cNvSpPr txBox="1"/>
           <p:nvPr/>
         </p:nvSpPr>
         <p:spPr>
@@ -630,8 +630,8 @@
       </p:sp>
       <p:sp>
         <p:nvSpPr>
-          <p:cNvPr id="10007" name="TextBox 3"/>
-          <p:cNvSpPr/>
+          <p:cNvPr id="100007" name="TextBox 3"/>
+          <p:cNvSpPr txBox="1"/>
           <p:nvPr/>
         </p:nvSpPr>
         <p:spPr>
@@ -675,8 +675,8 @@
       <p:grpSpPr/>
       <p:sp>
         <p:nvSpPr>
-          <p:cNvPr id="10008" name="TextBox 1"/>
-          <p:cNvSpPr/>
+          <p:cNvPr id="100008" name="TextBox 1"/>
+          <p:cNvSpPr txBox="1"/>
           <p:nvPr/>
         </p:nvSpPr>
         <p:spPr>
@@ -698,7 +698,7 @@
             </a:r>
             <a:r>
               <a:rPr lang="en-US"/>
-              <a:t>The </a:t>
+              <a:t xml:space="preserve">The </a:t>
             </a:r>
             <a:r>
               <a:rPr lang="en-US" b="1">
@@ -706,7 +706,7 @@
                   <a:srgbClr val="E63946"/>
                 </a:solidFill>
               </a:rPr>
-              <a:t>quick </a:t>
+              <a:t xml:space="preserve">quick </a:t>
             </a:r>
             <a:r>
               <a:rPr lang="en-US" i="1">
@@ -714,11 +714,11 @@
                   <a:srgbClr val="A0522D"/>
                 </a:solidFill>
               </a:rPr>
-              <a:t>brown </a:t>
-            </a:r>
-            <a:r>
-              <a:rPr lang="en-US"/>
-              <a:t>fox jumps over the </a:t>
+              <a:t xml:space="preserve">brown </a:t>
+            </a:r>
+            <a:r>
+              <a:rPr lang="en-US"/>
+              <a:t xml:space="preserve">fox jumps over the </a:t>
             </a:r>
             <a:r>
               <a:rPr lang="en-US" u="sng">
@@ -726,7 +726,7 @@
                   <a:srgbClr val="2A9D8F"/>
                 </a:solidFill>
               </a:rPr>
-              <a:t>lazy </a:t>
+              <a:t xml:space="preserve">lazy </a:t>
             </a:r>
             <a:r>
               <a:rPr lang="en-US"/>
@@ -737,8 +737,8 @@
       </p:sp>
       <p:sp>
         <p:nvSpPr>
-          <p:cNvPr id="10009" name="TextBox 2"/>
-          <p:cNvSpPr/>
+          <p:cNvPr id="100009" name="TextBox 2"/>
+          <p:cNvSpPr txBox="1"/>
           <p:nvPr/>
         </p:nvSpPr>
         <p:spPr>
@@ -756,35 +756,32 @@
           <a:p xmlns:a="http://schemas.openxmlformats.org/drawingml/2006/main">
             <a:r>
               <a:rPr lang="en-US" sz="2000"/>
-              <a:t/>
-            </a:r>
-            <a:r>
-              <a:rPr lang="en-US"/>
               <a:t>E = mc</a:t>
             </a:r>
             <a:r>
-              <a:rPr lang="en-US" baseline="30000"/>
+              <a:rPr lang="en-US" sz="2000" baseline="30000"/>
               <a:t>2</a:t>
             </a:r>
             <a:r>
-              <a:rPr lang="en-US"/>
-              <a:t>    and H</a:t>
-            </a:r>
-            <a:r>
-              <a:rPr lang="en-US" baseline="-25000"/>
+              <a:rPr lang="en-US" sz="2000"/>
+              <a:t xml:space="preserve">    and H</a:t>
+            </a:r>
+            <a:r>
+              <a:rPr lang="en-US" sz="2000" baseline="-25000"/>
               <a:t>2</a:t>
             </a:r>
             <a:r>
-              <a:rPr lang="en-US"/>
+              <a:rPr lang="en-US" sz="2000"/>
               <a:t>O</a:t>
             </a:r>
-          </a:p>
-        </p:txBody>
-      </p:sp>
-      <p:sp>
-        <p:nvSpPr>
-          <p:cNvPr id="10010" name="TextBox 3"/>
-          <p:cNvSpPr/>
+            <a:endParaRPr lang="en-US" sz="2000"/>
+          </a:p>
+        </p:txBody>
+      </p:sp>
+      <p:sp>
+        <p:nvSpPr>
+          <p:cNvPr id="100010" name="TextBox 3"/>
+          <p:cNvSpPr txBox="1"/>
           <p:nvPr/>
         </p:nvSpPr>
         <p:spPr>
@@ -801,16 +798,12 @@
           <a:lstStyle xmlns:a="http://schemas.openxmlformats.org/drawingml/2006/main"/>
           <a:p xmlns:a="http://schemas.openxmlformats.org/drawingml/2006/main">
             <a:r>
-              <a:rPr lang="en-US" sz="2400"/>
-              <a:t/>
-            </a:r>
-            <a:r>
-              <a:rPr lang="en-US" strike="sngStrike">
+              <a:rPr lang="en-US" sz="2400" strike="sngStrike">
                 <a:solidFill>
                   <a:srgbClr val="999999"/>
                 </a:solidFill>
               </a:rPr>
-              <a:t>OLD PRICE: $99   </a:t>
+              <a:t xml:space="preserve">OLD PRICE: $99   </a:t>
             </a:r>
             <a:r>
               <a:rPr lang="en-US" sz="2400" b="1">
@@ -820,13 +813,14 @@
               </a:rPr>
               <a:t>NOW $49!</a:t>
             </a:r>
-          </a:p>
-        </p:txBody>
-      </p:sp>
-      <p:sp>
-        <p:nvSpPr>
-          <p:cNvPr id="10011" name="TextBox 4"/>
-          <p:cNvSpPr/>
+            <a:endParaRPr lang="en-US" sz="2400"/>
+          </a:p>
+        </p:txBody>
+      </p:sp>
+      <p:sp>
+        <p:nvSpPr>
+          <p:cNvPr id="100011" name="TextBox 4"/>
+          <p:cNvSpPr txBox="1"/>
           <p:nvPr/>
         </p:nvSpPr>
         <p:spPr>
@@ -842,10 +836,7 @@
           <a:bodyPr xmlns:a="http://schemas.openxmlformats.org/drawingml/2006/main"/>
           <a:lstStyle xmlns:a="http://schemas.openxmlformats.org/drawingml/2006/main"/>
           <a:p xmlns:a="http://schemas.openxmlformats.org/drawingml/2006/main">
-            <a:r>
-              <a:rPr lang="en-US" sz="2000"/>
-              <a:t/>
-            </a:r>
+            <a:endParaRPr lang="en-US" sz="2000"/>
           </a:p>
         </p:txBody>
       </p:sp>
@@ -866,8 +857,8 @@
       <p:grpSpPr/>
       <p:sp>
         <p:nvSpPr>
-          <p:cNvPr id="10012" name="TextBox 1"/>
-          <p:cNvSpPr/>
+          <p:cNvPr id="100012" name="TextBox 1"/>
+          <p:cNvSpPr txBox="1"/>
           <p:nvPr/>
         </p:nvSpPr>
         <p:spPr>
@@ -892,8 +883,8 @@
       </p:sp>
       <p:sp>
         <p:nvSpPr>
-          <p:cNvPr id="10013" name="TextBox 2"/>
-          <p:cNvSpPr/>
+          <p:cNvPr id="100013" name="TextBox 2"/>
+          <p:cNvSpPr txBox="1"/>
           <p:nvPr/>
         </p:nvSpPr>
         <p:spPr>
@@ -924,8 +915,8 @@
       </p:sp>
       <p:sp>
         <p:nvSpPr>
-          <p:cNvPr id="10014" name="TextBox 3"/>
-          <p:cNvSpPr/>
+          <p:cNvPr id="100014" name="TextBox 3"/>
+          <p:cNvSpPr txBox="1"/>
           <p:nvPr/>
         </p:nvSpPr>
         <p:spPr>
@@ -954,8 +945,8 @@
       </p:sp>
       <p:sp>
         <p:nvSpPr>
-          <p:cNvPr id="10015" name="TextBox 4"/>
-          <p:cNvSpPr/>
+          <p:cNvPr id="100015" name="TextBox 4"/>
+          <p:cNvSpPr txBox="1"/>
           <p:nvPr/>
         </p:nvSpPr>
         <p:spPr>
@@ -984,8 +975,8 @@
       </p:sp>
       <p:sp>
         <p:nvSpPr>
-          <p:cNvPr id="10016" name="TextBox 5"/>
-          <p:cNvSpPr/>
+          <p:cNvPr id="100016" name="TextBox 5"/>
+          <p:cNvSpPr txBox="1"/>
           <p:nvPr/>
         </p:nvSpPr>
         <p:spPr>
@@ -1014,8 +1005,8 @@
       </p:sp>
       <p:sp>
         <p:nvSpPr>
-          <p:cNvPr id="10017" name="TextBox 6"/>
-          <p:cNvSpPr/>
+          <p:cNvPr id="100017" name="TextBox 6"/>
+          <p:cNvSpPr txBox="1"/>
           <p:nvPr/>
         </p:nvSpPr>
         <p:spPr>
@@ -1044,8 +1035,8 @@
       </p:sp>
       <p:sp>
         <p:nvSpPr>
-          <p:cNvPr id="10018" name="TextBox 7"/>
-          <p:cNvSpPr/>
+          <p:cNvPr id="100018" name="TextBox 7"/>
+          <p:cNvSpPr txBox="1"/>
           <p:nvPr/>
         </p:nvSpPr>
         <p:spPr>
